--- a/tests/fixtures/sources/deck.pptx
+++ b/tests/fixtures/sources/deck.pptx
@@ -148,7 +148,7 @@
         <p:txBody>
           <a:bodyPr/>
           <a:p>
-            <a:fld id="{3A309B81-22F3-477B-B4A9-ABE3AB8FFE02}" type="slidenum">
+            <a:fld id="{00000000-0000-4000-8000-000000000002}" type="slidenum">
               <a:t>&lt;#&gt;</a:t>
             </a:fld>
           </a:p>
@@ -231,7 +231,7 @@
         <p:txBody>
           <a:bodyPr/>
           <a:p>
-            <a:fld id="{FDDE51F8-6C7D-41FE-A212-4ABD62FA61F7}" type="slidenum">
+            <a:fld id="{00000000-0000-4000-8000-000000000003}" type="slidenum">
               <a:t>&lt;#&gt;</a:t>
             </a:fld>
           </a:p>
@@ -910,7 +910,7 @@
             <a:pPr indent="0" algn="r">
               <a:buNone/>
             </a:pPr>
-            <a:fld id="{2A9C478C-9968-48EF-B167-ED2137658BAB}" type="slidenum">
+            <a:fld id="{00000000-0000-4000-8000-000000000001}" type="slidenum">
               <a:rPr lang="en-US" sz="1400" b="0" u="none" strike="noStrike">
                 <a:solidFill>
                   <a:srgbClr val="000000"/>
